--- a/CQG.pptx
+++ b/CQG.pptx
@@ -106,6 +106,11 @@
       </a:defRPr>
     </a:lvl9pPr>
   </p:defaultTextStyle>
+  <p:extLst>
+    <p:ext uri="{EFAFB233-063F-42B5-8137-9DF3F51BA10A}">
+      <p15:sldGuideLst xmlns:p15="http://schemas.microsoft.com/office/powerpoint/2012/main"/>
+    </p:ext>
+  </p:extLst>
 </p:presentation>
 </file>
 
@@ -3337,7 +3342,7 @@
         </p:nvSpPr>
         <p:spPr>
           <a:xfrm>
-            <a:off x="864198" y="2163803"/>
+            <a:off x="782618" y="2292896"/>
             <a:ext cx="9886277" cy="584775"/>
           </a:xfrm>
           <a:prstGeom prst="rect">
@@ -3382,7 +3387,7 @@
         </p:nvSpPr>
         <p:spPr>
           <a:xfrm>
-            <a:off x="2183802" y="4109422"/>
+            <a:off x="2678654" y="4801525"/>
             <a:ext cx="8412479" cy="923330"/>
           </a:xfrm>
           <a:prstGeom prst="rect">
@@ -3409,6 +3414,41 @@
             <a:r>
               <a:rPr lang="zh-CN" altLang="en-US" dirty="0"/>
               <a:t>题目的难度可以由模型来判断，但是学生的犯错特性需要后训练的学习</a:t>
+            </a:r>
+          </a:p>
+        </p:txBody>
+      </p:sp>
+      <p:sp>
+        <p:nvSpPr>
+          <p:cNvPr id="3" name="文本框 2">
+            <a:extLst>
+              <a:ext uri="{FF2B5EF4-FFF2-40B4-BE49-F238E27FC236}">
+                <a16:creationId xmlns:a16="http://schemas.microsoft.com/office/drawing/2014/main" id="{225624A8-61ED-3236-B9CE-097C358A652F}"/>
+              </a:ext>
+            </a:extLst>
+          </p:cNvPr>
+          <p:cNvSpPr txBox="1"/>
+          <p:nvPr/>
+        </p:nvSpPr>
+        <p:spPr>
+          <a:xfrm>
+            <a:off x="2678654" y="3698846"/>
+            <a:ext cx="6094206" cy="369332"/>
+          </a:xfrm>
+          <a:prstGeom prst="rect">
+            <a:avLst/>
+          </a:prstGeom>
+          <a:noFill/>
+        </p:spPr>
+        <p:txBody>
+          <a:bodyPr wrap="square">
+            <a:spAutoFit/>
+          </a:bodyPr>
+          <a:lstStyle/>
+          <a:p>
+            <a:r>
+              <a:rPr lang="zh-CN" altLang="en-US" dirty="0"/>
+              <a:t>我的开源仓库：https://github.com/iPhone38/CQG.git</a:t>
             </a:r>
           </a:p>
         </p:txBody>

--- a/CQG.pptx
+++ b/CQG.pptx
@@ -8,6 +8,9 @@
     <p:sldId id="256" r:id="rId2"/>
     <p:sldId id="258" r:id="rId3"/>
     <p:sldId id="257" r:id="rId4"/>
+    <p:sldId id="261" r:id="rId5"/>
+    <p:sldId id="259" r:id="rId6"/>
+    <p:sldId id="260" r:id="rId7"/>
   </p:sldIdLst>
   <p:sldSz cx="12192000" cy="6858000"/>
   <p:notesSz cx="6858000" cy="9144000"/>
@@ -3387,7 +3390,7 @@
         </p:nvSpPr>
         <p:spPr>
           <a:xfrm>
-            <a:off x="2678654" y="4801525"/>
+            <a:off x="2256416" y="3980330"/>
             <a:ext cx="8412479" cy="923330"/>
           </a:xfrm>
           <a:prstGeom prst="rect">
@@ -3432,7 +3435,7 @@
         </p:nvSpPr>
         <p:spPr>
           <a:xfrm>
-            <a:off x="2678654" y="3698846"/>
+            <a:off x="2764715" y="6399015"/>
             <a:ext cx="6094206" cy="369332"/>
           </a:xfrm>
           <a:prstGeom prst="rect">
@@ -4992,6 +4995,276 @@
     <p:extLst>
       <p:ext uri="{BB962C8B-B14F-4D97-AF65-F5344CB8AC3E}">
         <p14:creationId xmlns:p14="http://schemas.microsoft.com/office/powerpoint/2010/main" val="2512188360"/>
+      </p:ext>
+    </p:extLst>
+  </p:cSld>
+  <p:clrMapOvr>
+    <a:masterClrMapping/>
+  </p:clrMapOvr>
+</p:sld>
+</file>
+
+<file path=ppt/slides/slide4.xml><?xml version="1.0" encoding="utf-8"?>
+<p:sld xmlns:a="http://schemas.openxmlformats.org/drawingml/2006/main" xmlns:r="http://schemas.openxmlformats.org/officeDocument/2006/relationships" xmlns:p="http://schemas.openxmlformats.org/presentationml/2006/main">
+  <p:cSld>
+    <p:spTree>
+      <p:nvGrpSpPr>
+        <p:cNvPr id="1" name=""/>
+        <p:cNvGrpSpPr/>
+        <p:nvPr/>
+      </p:nvGrpSpPr>
+      <p:grpSpPr>
+        <a:xfrm>
+          <a:off x="0" y="0"/>
+          <a:ext cx="0" cy="0"/>
+          <a:chOff x="0" y="0"/>
+          <a:chExt cx="0" cy="0"/>
+        </a:xfrm>
+      </p:grpSpPr>
+      <p:sp>
+        <p:nvSpPr>
+          <p:cNvPr id="2" name="标题 1">
+            <a:extLst>
+              <a:ext uri="{FF2B5EF4-FFF2-40B4-BE49-F238E27FC236}">
+                <a16:creationId xmlns:a16="http://schemas.microsoft.com/office/drawing/2014/main" id="{048A5C24-9068-FD73-DD2D-E778768FCE58}"/>
+              </a:ext>
+            </a:extLst>
+          </p:cNvPr>
+          <p:cNvSpPr>
+            <a:spLocks noGrp="1"/>
+          </p:cNvSpPr>
+          <p:nvPr>
+            <p:ph type="title"/>
+          </p:nvPr>
+        </p:nvSpPr>
+        <p:spPr>
+          <a:xfrm>
+            <a:off x="572844" y="1290282"/>
+            <a:ext cx="10515600" cy="1325563"/>
+          </a:xfrm>
+        </p:spPr>
+        <p:txBody>
+          <a:bodyPr/>
+          <a:lstStyle/>
+          <a:p>
+            <a:pPr marL="571500" indent="-571500">
+              <a:buFont typeface="Arial" panose="020B0604020202020204" pitchFamily="34" charset="0"/>
+              <a:buChar char="•"/>
+            </a:pPr>
+            <a:r>
+              <a:rPr lang="zh-CN" altLang="en-US" dirty="0"/>
+              <a:t>当前进度：实现基本工作流</a:t>
+            </a:r>
+          </a:p>
+        </p:txBody>
+      </p:sp>
+      <p:sp>
+        <p:nvSpPr>
+          <p:cNvPr id="5" name="文本框 4">
+            <a:extLst>
+              <a:ext uri="{FF2B5EF4-FFF2-40B4-BE49-F238E27FC236}">
+                <a16:creationId xmlns:a16="http://schemas.microsoft.com/office/drawing/2014/main" id="{A30C5B5F-75BD-77D5-624A-18D4FFC0FB34}"/>
+              </a:ext>
+            </a:extLst>
+          </p:cNvPr>
+          <p:cNvSpPr txBox="1"/>
+          <p:nvPr/>
+        </p:nvSpPr>
+        <p:spPr>
+          <a:xfrm>
+            <a:off x="572844" y="3752632"/>
+            <a:ext cx="10217075" cy="769441"/>
+          </a:xfrm>
+          <a:prstGeom prst="rect">
+            <a:avLst/>
+          </a:prstGeom>
+          <a:noFill/>
+        </p:spPr>
+        <p:txBody>
+          <a:bodyPr wrap="square">
+            <a:spAutoFit/>
+          </a:bodyPr>
+          <a:lstStyle/>
+          <a:p>
+            <a:pPr marL="571500" indent="-571500">
+              <a:buFont typeface="Arial" panose="020B0604020202020204" pitchFamily="34" charset="0"/>
+              <a:buChar char="•"/>
+            </a:pPr>
+            <a:r>
+              <a:rPr lang="zh-CN" altLang="en-US" sz="4400" dirty="0">
+                <a:latin typeface="+mj-lt"/>
+                <a:ea typeface="+mj-ea"/>
+                <a:cs typeface="+mj-cs"/>
+              </a:rPr>
+              <a:t>后续工作：学生数据收集 </a:t>
+            </a:r>
+            <a:r>
+              <a:rPr lang="en-US" altLang="zh-CN" sz="4400" dirty="0">
+                <a:latin typeface="+mj-lt"/>
+                <a:ea typeface="+mj-ea"/>
+                <a:cs typeface="+mj-cs"/>
+              </a:rPr>
+              <a:t>+ </a:t>
+            </a:r>
+            <a:r>
+              <a:rPr lang="zh-CN" altLang="en-US" sz="4400" dirty="0">
+                <a:latin typeface="+mj-lt"/>
+                <a:ea typeface="+mj-ea"/>
+                <a:cs typeface="+mj-cs"/>
+              </a:rPr>
+              <a:t>训练微调</a:t>
+            </a:r>
+          </a:p>
+        </p:txBody>
+      </p:sp>
+    </p:spTree>
+    <p:extLst>
+      <p:ext uri="{BB962C8B-B14F-4D97-AF65-F5344CB8AC3E}">
+        <p14:creationId xmlns:p14="http://schemas.microsoft.com/office/powerpoint/2010/main" val="1848110669"/>
+      </p:ext>
+    </p:extLst>
+  </p:cSld>
+  <p:clrMapOvr>
+    <a:masterClrMapping/>
+  </p:clrMapOvr>
+</p:sld>
+</file>
+
+<file path=ppt/slides/slide5.xml><?xml version="1.0" encoding="utf-8"?>
+<p:sld xmlns:a="http://schemas.openxmlformats.org/drawingml/2006/main" xmlns:r="http://schemas.openxmlformats.org/officeDocument/2006/relationships" xmlns:p="http://schemas.openxmlformats.org/presentationml/2006/main">
+  <p:cSld>
+    <p:spTree>
+      <p:nvGrpSpPr>
+        <p:cNvPr id="1" name="">
+          <a:extLst>
+            <a:ext uri="{FF2B5EF4-FFF2-40B4-BE49-F238E27FC236}">
+              <a16:creationId xmlns:a16="http://schemas.microsoft.com/office/drawing/2014/main" id="{5BF4D5D0-554A-EEB9-9FD0-E3DEDB580CE6}"/>
+            </a:ext>
+          </a:extLst>
+        </p:cNvPr>
+        <p:cNvGrpSpPr/>
+        <p:nvPr/>
+      </p:nvGrpSpPr>
+      <p:grpSpPr>
+        <a:xfrm>
+          <a:off x="0" y="0"/>
+          <a:ext cx="0" cy="0"/>
+          <a:chOff x="0" y="0"/>
+          <a:chExt cx="0" cy="0"/>
+        </a:xfrm>
+      </p:grpSpPr>
+      <p:pic>
+        <p:nvPicPr>
+          <p:cNvPr id="9" name="图片 8">
+            <a:extLst>
+              <a:ext uri="{FF2B5EF4-FFF2-40B4-BE49-F238E27FC236}">
+                <a16:creationId xmlns:a16="http://schemas.microsoft.com/office/drawing/2014/main" id="{1B7672B4-ACFF-FB3F-A99E-11F4EA89E93E}"/>
+              </a:ext>
+            </a:extLst>
+          </p:cNvPr>
+          <p:cNvPicPr>
+            <a:picLocks noChangeAspect="1"/>
+          </p:cNvPicPr>
+          <p:nvPr/>
+        </p:nvPicPr>
+        <p:blipFill>
+          <a:blip r:embed="rId2">
+            <a:extLst>
+              <a:ext uri="{28A0092B-C50C-407E-A947-70E740481C1C}">
+                <a14:useLocalDpi xmlns:a14="http://schemas.microsoft.com/office/drawing/2010/main" val="0"/>
+              </a:ext>
+            </a:extLst>
+          </a:blip>
+          <a:stretch>
+            <a:fillRect/>
+          </a:stretch>
+        </p:blipFill>
+        <p:spPr>
+          <a:xfrm>
+            <a:off x="0" y="0"/>
+            <a:ext cx="12192000" cy="6858000"/>
+          </a:xfrm>
+          <a:prstGeom prst="rect">
+            <a:avLst/>
+          </a:prstGeom>
+        </p:spPr>
+      </p:pic>
+    </p:spTree>
+    <p:extLst>
+      <p:ext uri="{BB962C8B-B14F-4D97-AF65-F5344CB8AC3E}">
+        <p14:creationId xmlns:p14="http://schemas.microsoft.com/office/powerpoint/2010/main" val="4285849870"/>
+      </p:ext>
+    </p:extLst>
+  </p:cSld>
+  <p:clrMapOvr>
+    <a:masterClrMapping/>
+  </p:clrMapOvr>
+</p:sld>
+</file>
+
+<file path=ppt/slides/slide6.xml><?xml version="1.0" encoding="utf-8"?>
+<p:sld xmlns:a="http://schemas.openxmlformats.org/drawingml/2006/main" xmlns:r="http://schemas.openxmlformats.org/officeDocument/2006/relationships" xmlns:p="http://schemas.openxmlformats.org/presentationml/2006/main">
+  <p:cSld>
+    <p:spTree>
+      <p:nvGrpSpPr>
+        <p:cNvPr id="1" name="">
+          <a:extLst>
+            <a:ext uri="{FF2B5EF4-FFF2-40B4-BE49-F238E27FC236}">
+              <a16:creationId xmlns:a16="http://schemas.microsoft.com/office/drawing/2014/main" id="{7B3B4F8E-9A2B-2483-744B-9DFFDF0D0A19}"/>
+            </a:ext>
+          </a:extLst>
+        </p:cNvPr>
+        <p:cNvGrpSpPr/>
+        <p:nvPr/>
+      </p:nvGrpSpPr>
+      <p:grpSpPr>
+        <a:xfrm>
+          <a:off x="0" y="0"/>
+          <a:ext cx="0" cy="0"/>
+          <a:chOff x="0" y="0"/>
+          <a:chExt cx="0" cy="0"/>
+        </a:xfrm>
+      </p:grpSpPr>
+      <p:pic>
+        <p:nvPicPr>
+          <p:cNvPr id="3" name="图片 2">
+            <a:extLst>
+              <a:ext uri="{FF2B5EF4-FFF2-40B4-BE49-F238E27FC236}">
+                <a16:creationId xmlns:a16="http://schemas.microsoft.com/office/drawing/2014/main" id="{47BA0133-C7E7-707C-D187-F8FC987072D1}"/>
+              </a:ext>
+            </a:extLst>
+          </p:cNvPr>
+          <p:cNvPicPr>
+            <a:picLocks noChangeAspect="1"/>
+          </p:cNvPicPr>
+          <p:nvPr/>
+        </p:nvPicPr>
+        <p:blipFill>
+          <a:blip r:embed="rId2">
+            <a:extLst>
+              <a:ext uri="{28A0092B-C50C-407E-A947-70E740481C1C}">
+                <a14:useLocalDpi xmlns:a14="http://schemas.microsoft.com/office/drawing/2010/main" val="0"/>
+              </a:ext>
+            </a:extLst>
+          </a:blip>
+          <a:stretch>
+            <a:fillRect/>
+          </a:stretch>
+        </p:blipFill>
+        <p:spPr>
+          <a:xfrm>
+            <a:off x="0" y="79375"/>
+            <a:ext cx="12192000" cy="6699250"/>
+          </a:xfrm>
+          <a:prstGeom prst="rect">
+            <a:avLst/>
+          </a:prstGeom>
+        </p:spPr>
+      </p:pic>
+    </p:spTree>
+    <p:extLst>
+      <p:ext uri="{BB962C8B-B14F-4D97-AF65-F5344CB8AC3E}">
+        <p14:creationId xmlns:p14="http://schemas.microsoft.com/office/powerpoint/2010/main" val="5731193"/>
       </p:ext>
     </p:extLst>
   </p:cSld>
